--- a/Pregrado/Creatividad y pensamiento innovador/Clases/Sesion 06 - Vigilancia tecnológica/Presentacion.pptx
+++ b/Pregrado/Creatividad y pensamiento innovador/Clases/Sesion 06 - Vigilancia tecnológica/Presentacion.pptx
@@ -3370,41 +3370,6 @@
           </a:p>
         </p:txBody>
       </p:sp>
-      <p:sp>
-        <p:nvSpPr>
-          <p:cNvPr id="7" name="TextBox 6"/>
-          <p:cNvSpPr txBox="1"/>
-          <p:nvPr/>
-        </p:nvSpPr>
-        <p:spPr>
-          <a:xfrm>
-            <a:off x="2194560" y="6446520"/>
-            <a:ext cx="5943600" cy="274320"/>
-          </a:xfrm>
-          <a:prstGeom prst="rect">
-            <a:avLst/>
-          </a:prstGeom>
-          <a:noFill/>
-        </p:spPr>
-        <p:txBody>
-          <a:bodyPr wrap="square" anchor="t" lIns="0" rIns="0" tIns="0" bIns="0">
-            <a:spAutoFit/>
-          </a:bodyPr>
-          <a:lstStyle/>
-          <a:p>
-            <a:pPr algn="l"/>
-            <a:r>
-              <a:rPr sz="1000" b="1" i="0">
-                <a:solidFill>
-                  <a:srgbClr val="8F989D"/>
-                </a:solidFill>
-                <a:latin typeface="Calibri"/>
-              </a:rPr>
-              <a:t>Inicio 5:10 pm</a:t>
-            </a:r>
-          </a:p>
-        </p:txBody>
-      </p:sp>
     </p:spTree>
   </p:cSld>
   <p:clrMapOvr>
@@ -3575,41 +3540,6 @@
         </p:nvSpPr>
         <p:spPr>
           <a:xfrm>
-            <a:off x="2194560" y="6446520"/>
-            <a:ext cx="5943600" cy="274320"/>
-          </a:xfrm>
-          <a:prstGeom prst="rect">
-            <a:avLst/>
-          </a:prstGeom>
-          <a:noFill/>
-        </p:spPr>
-        <p:txBody>
-          <a:bodyPr wrap="square" anchor="t" lIns="0" rIns="0" tIns="0" bIns="0">
-            <a:spAutoFit/>
-          </a:bodyPr>
-          <a:lstStyle/>
-          <a:p>
-            <a:pPr algn="l"/>
-            <a:r>
-              <a:rPr sz="1000" b="1" i="0">
-                <a:solidFill>
-                  <a:srgbClr val="8F989D"/>
-                </a:solidFill>
-                <a:latin typeface="Calibri"/>
-              </a:rPr>
-              <a:t>Inicio 5:10 pm</a:t>
-            </a:r>
-          </a:p>
-        </p:txBody>
-      </p:sp>
-      <p:sp>
-        <p:nvSpPr>
-          <p:cNvPr id="6" name="TextBox 5"/>
-          <p:cNvSpPr txBox="1"/>
-          <p:nvPr/>
-        </p:nvSpPr>
-        <p:spPr>
-          <a:xfrm>
             <a:off x="11094415" y="6446520"/>
             <a:ext cx="548640" cy="274320"/>
           </a:xfrm>
@@ -3639,7 +3569,7 @@
       </p:sp>
       <p:sp>
         <p:nvSpPr>
-          <p:cNvPr id="7" name="TextBox 6"/>
+          <p:cNvPr id="6" name="TextBox 5"/>
           <p:cNvSpPr txBox="1"/>
           <p:nvPr/>
         </p:nvSpPr>
@@ -4122,41 +4052,6 @@
         </p:nvSpPr>
         <p:spPr>
           <a:xfrm>
-            <a:off x="2194560" y="6446520"/>
-            <a:ext cx="5943600" cy="274320"/>
-          </a:xfrm>
-          <a:prstGeom prst="rect">
-            <a:avLst/>
-          </a:prstGeom>
-          <a:noFill/>
-        </p:spPr>
-        <p:txBody>
-          <a:bodyPr wrap="square" anchor="t" lIns="0" rIns="0" tIns="0" bIns="0">
-            <a:spAutoFit/>
-          </a:bodyPr>
-          <a:lstStyle/>
-          <a:p>
-            <a:pPr algn="l"/>
-            <a:r>
-              <a:rPr sz="1000" b="1" i="0">
-                <a:solidFill>
-                  <a:srgbClr val="8F989D"/>
-                </a:solidFill>
-                <a:latin typeface="Calibri"/>
-              </a:rPr>
-              <a:t>Inicio 5:10 pm</a:t>
-            </a:r>
-          </a:p>
-        </p:txBody>
-      </p:sp>
-      <p:sp>
-        <p:nvSpPr>
-          <p:cNvPr id="6" name="TextBox 5"/>
-          <p:cNvSpPr txBox="1"/>
-          <p:nvPr/>
-        </p:nvSpPr>
-        <p:spPr>
-          <a:xfrm>
             <a:off x="11094415" y="6446520"/>
             <a:ext cx="548640" cy="274320"/>
           </a:xfrm>
@@ -4437,41 +4332,6 @@
       <p:sp>
         <p:nvSpPr>
           <p:cNvPr id="5" name="TextBox 4"/>
-          <p:cNvSpPr txBox="1"/>
-          <p:nvPr/>
-        </p:nvSpPr>
-        <p:spPr>
-          <a:xfrm>
-            <a:off x="2194560" y="6446520"/>
-            <a:ext cx="5943600" cy="274320"/>
-          </a:xfrm>
-          <a:prstGeom prst="rect">
-            <a:avLst/>
-          </a:prstGeom>
-          <a:noFill/>
-        </p:spPr>
-        <p:txBody>
-          <a:bodyPr wrap="square" anchor="t" lIns="0" rIns="0" tIns="0" bIns="0">
-            <a:spAutoFit/>
-          </a:bodyPr>
-          <a:lstStyle/>
-          <a:p>
-            <a:pPr algn="l"/>
-            <a:r>
-              <a:rPr sz="1000" b="1" i="0">
-                <a:solidFill>
-                  <a:srgbClr val="8F989D"/>
-                </a:solidFill>
-                <a:latin typeface="Calibri"/>
-              </a:rPr>
-              <a:t>Inicio 5:10 pm</a:t>
-            </a:r>
-          </a:p>
-        </p:txBody>
-      </p:sp>
-      <p:sp>
-        <p:nvSpPr>
-          <p:cNvPr id="6" name="TextBox 5"/>
           <p:cNvSpPr txBox="1"/>
           <p:nvPr/>
         </p:nvSpPr>
@@ -5212,41 +5072,6 @@
         </p:nvSpPr>
         <p:spPr>
           <a:xfrm>
-            <a:off x="2194560" y="6446520"/>
-            <a:ext cx="5943600" cy="274320"/>
-          </a:xfrm>
-          <a:prstGeom prst="rect">
-            <a:avLst/>
-          </a:prstGeom>
-          <a:noFill/>
-        </p:spPr>
-        <p:txBody>
-          <a:bodyPr wrap="square" anchor="t" lIns="0" rIns="0" tIns="0" bIns="0">
-            <a:spAutoFit/>
-          </a:bodyPr>
-          <a:lstStyle/>
-          <a:p>
-            <a:pPr algn="l"/>
-            <a:r>
-              <a:rPr sz="1000" b="1" i="0">
-                <a:solidFill>
-                  <a:srgbClr val="8F989D"/>
-                </a:solidFill>
-                <a:latin typeface="Calibri"/>
-              </a:rPr>
-              <a:t>Inicio 5:10 pm</a:t>
-            </a:r>
-          </a:p>
-        </p:txBody>
-      </p:sp>
-      <p:sp>
-        <p:nvSpPr>
-          <p:cNvPr id="7" name="TextBox 6"/>
-          <p:cNvSpPr txBox="1"/>
-          <p:nvPr/>
-        </p:nvSpPr>
-        <p:spPr>
-          <a:xfrm>
             <a:off x="11094415" y="6446520"/>
             <a:ext cx="548640" cy="274320"/>
           </a:xfrm>
@@ -5750,41 +5575,6 @@
         </p:nvSpPr>
         <p:spPr>
           <a:xfrm>
-            <a:off x="2194560" y="6446520"/>
-            <a:ext cx="5943600" cy="274320"/>
-          </a:xfrm>
-          <a:prstGeom prst="rect">
-            <a:avLst/>
-          </a:prstGeom>
-          <a:noFill/>
-        </p:spPr>
-        <p:txBody>
-          <a:bodyPr wrap="square" anchor="t" lIns="0" rIns="0" tIns="0" bIns="0">
-            <a:spAutoFit/>
-          </a:bodyPr>
-          <a:lstStyle/>
-          <a:p>
-            <a:pPr algn="l"/>
-            <a:r>
-              <a:rPr sz="1000" b="1" i="0">
-                <a:solidFill>
-                  <a:srgbClr val="8F989D"/>
-                </a:solidFill>
-                <a:latin typeface="Calibri"/>
-              </a:rPr>
-              <a:t>Inicio 5:10 pm</a:t>
-            </a:r>
-          </a:p>
-        </p:txBody>
-      </p:sp>
-      <p:sp>
-        <p:nvSpPr>
-          <p:cNvPr id="11" name="TextBox 10"/>
-          <p:cNvSpPr txBox="1"/>
-          <p:nvPr/>
-        </p:nvSpPr>
-        <p:spPr>
-          <a:xfrm>
             <a:off x="11094415" y="6446520"/>
             <a:ext cx="548640" cy="274320"/>
           </a:xfrm>
@@ -6306,41 +6096,6 @@
         </p:nvSpPr>
         <p:spPr>
           <a:xfrm>
-            <a:off x="2194560" y="6446520"/>
-            <a:ext cx="5943600" cy="274320"/>
-          </a:xfrm>
-          <a:prstGeom prst="rect">
-            <a:avLst/>
-          </a:prstGeom>
-          <a:noFill/>
-        </p:spPr>
-        <p:txBody>
-          <a:bodyPr wrap="square" anchor="t" lIns="0" rIns="0" tIns="0" bIns="0">
-            <a:spAutoFit/>
-          </a:bodyPr>
-          <a:lstStyle/>
-          <a:p>
-            <a:pPr algn="l"/>
-            <a:r>
-              <a:rPr sz="1000" b="1" i="0">
-                <a:solidFill>
-                  <a:srgbClr val="8F989D"/>
-                </a:solidFill>
-                <a:latin typeface="Calibri"/>
-              </a:rPr>
-              <a:t>Inicio 5:10 pm</a:t>
-            </a:r>
-          </a:p>
-        </p:txBody>
-      </p:sp>
-      <p:sp>
-        <p:nvSpPr>
-          <p:cNvPr id="11" name="TextBox 10"/>
-          <p:cNvSpPr txBox="1"/>
-          <p:nvPr/>
-        </p:nvSpPr>
-        <p:spPr>
-          <a:xfrm>
             <a:off x="11094415" y="6446520"/>
             <a:ext cx="548640" cy="274320"/>
           </a:xfrm>
@@ -6972,41 +6727,6 @@
         </p:nvSpPr>
         <p:spPr>
           <a:xfrm>
-            <a:off x="2194560" y="6446520"/>
-            <a:ext cx="5943600" cy="274320"/>
-          </a:xfrm>
-          <a:prstGeom prst="rect">
-            <a:avLst/>
-          </a:prstGeom>
-          <a:noFill/>
-        </p:spPr>
-        <p:txBody>
-          <a:bodyPr wrap="square" anchor="t" lIns="0" rIns="0" tIns="0" bIns="0">
-            <a:spAutoFit/>
-          </a:bodyPr>
-          <a:lstStyle/>
-          <a:p>
-            <a:pPr algn="l"/>
-            <a:r>
-              <a:rPr sz="1000" b="1" i="0">
-                <a:solidFill>
-                  <a:srgbClr val="8F989D"/>
-                </a:solidFill>
-                <a:latin typeface="Calibri"/>
-              </a:rPr>
-              <a:t>Inicio 5:10 pm</a:t>
-            </a:r>
-          </a:p>
-        </p:txBody>
-      </p:sp>
-      <p:sp>
-        <p:nvSpPr>
-          <p:cNvPr id="6" name="TextBox 5"/>
-          <p:cNvSpPr txBox="1"/>
-          <p:nvPr/>
-        </p:nvSpPr>
-        <p:spPr>
-          <a:xfrm>
             <a:off x="11094415" y="6446520"/>
             <a:ext cx="548640" cy="274320"/>
           </a:xfrm>
@@ -7222,41 +6942,6 @@
         </p:nvSpPr>
         <p:spPr>
           <a:xfrm>
-            <a:off x="2194560" y="6446520"/>
-            <a:ext cx="5943600" cy="274320"/>
-          </a:xfrm>
-          <a:prstGeom prst="rect">
-            <a:avLst/>
-          </a:prstGeom>
-          <a:noFill/>
-        </p:spPr>
-        <p:txBody>
-          <a:bodyPr wrap="square" anchor="t" lIns="0" rIns="0" tIns="0" bIns="0">
-            <a:spAutoFit/>
-          </a:bodyPr>
-          <a:lstStyle/>
-          <a:p>
-            <a:pPr algn="l"/>
-            <a:r>
-              <a:rPr sz="1000" b="1" i="0">
-                <a:solidFill>
-                  <a:srgbClr val="8F989D"/>
-                </a:solidFill>
-                <a:latin typeface="Calibri"/>
-              </a:rPr>
-              <a:t>Inicio 5:10 pm</a:t>
-            </a:r>
-          </a:p>
-        </p:txBody>
-      </p:sp>
-      <p:sp>
-        <p:nvSpPr>
-          <p:cNvPr id="6" name="TextBox 5"/>
-          <p:cNvSpPr txBox="1"/>
-          <p:nvPr/>
-        </p:nvSpPr>
-        <p:spPr>
-          <a:xfrm>
             <a:off x="11094415" y="6446520"/>
             <a:ext cx="548640" cy="274320"/>
           </a:xfrm>
@@ -7942,41 +7627,6 @@
         </p:nvSpPr>
         <p:spPr>
           <a:xfrm>
-            <a:off x="2194560" y="6446520"/>
-            <a:ext cx="5943600" cy="274320"/>
-          </a:xfrm>
-          <a:prstGeom prst="rect">
-            <a:avLst/>
-          </a:prstGeom>
-          <a:noFill/>
-        </p:spPr>
-        <p:txBody>
-          <a:bodyPr wrap="square" anchor="t" lIns="0" rIns="0" tIns="0" bIns="0">
-            <a:spAutoFit/>
-          </a:bodyPr>
-          <a:lstStyle/>
-          <a:p>
-            <a:pPr algn="l"/>
-            <a:r>
-              <a:rPr sz="1000" b="1" i="0">
-                <a:solidFill>
-                  <a:srgbClr val="8F989D"/>
-                </a:solidFill>
-                <a:latin typeface="Calibri"/>
-              </a:rPr>
-              <a:t>Inicio 5:10 pm</a:t>
-            </a:r>
-          </a:p>
-        </p:txBody>
-      </p:sp>
-      <p:sp>
-        <p:nvSpPr>
-          <p:cNvPr id="6" name="TextBox 5"/>
-          <p:cNvSpPr txBox="1"/>
-          <p:nvPr/>
-        </p:nvSpPr>
-        <p:spPr>
-          <a:xfrm>
             <a:off x="11094415" y="6446520"/>
             <a:ext cx="548640" cy="274320"/>
           </a:xfrm>
@@ -8006,7 +7656,7 @@
       </p:sp>
       <p:sp>
         <p:nvSpPr>
-          <p:cNvPr id="7" name="TextBox 6"/>
+          <p:cNvPr id="6" name="TextBox 5"/>
           <p:cNvSpPr txBox="1"/>
           <p:nvPr/>
         </p:nvSpPr>
@@ -8570,41 +8220,6 @@
         </p:nvSpPr>
         <p:spPr>
           <a:xfrm>
-            <a:off x="2194560" y="6446520"/>
-            <a:ext cx="5943600" cy="274320"/>
-          </a:xfrm>
-          <a:prstGeom prst="rect">
-            <a:avLst/>
-          </a:prstGeom>
-          <a:noFill/>
-        </p:spPr>
-        <p:txBody>
-          <a:bodyPr wrap="square" anchor="t" lIns="0" rIns="0" tIns="0" bIns="0">
-            <a:spAutoFit/>
-          </a:bodyPr>
-          <a:lstStyle/>
-          <a:p>
-            <a:pPr algn="l"/>
-            <a:r>
-              <a:rPr sz="1000" b="1" i="0">
-                <a:solidFill>
-                  <a:srgbClr val="8F989D"/>
-                </a:solidFill>
-                <a:latin typeface="Calibri"/>
-              </a:rPr>
-              <a:t>Inicio 5:10 pm</a:t>
-            </a:r>
-          </a:p>
-        </p:txBody>
-      </p:sp>
-      <p:sp>
-        <p:nvSpPr>
-          <p:cNvPr id="6" name="TextBox 5"/>
-          <p:cNvSpPr txBox="1"/>
-          <p:nvPr/>
-        </p:nvSpPr>
-        <p:spPr>
-          <a:xfrm>
             <a:off x="11094415" y="6446520"/>
             <a:ext cx="548640" cy="274320"/>
           </a:xfrm>
@@ -9022,41 +8637,6 @@
         </p:nvSpPr>
         <p:spPr>
           <a:xfrm>
-            <a:off x="2194560" y="6446520"/>
-            <a:ext cx="5943600" cy="274320"/>
-          </a:xfrm>
-          <a:prstGeom prst="rect">
-            <a:avLst/>
-          </a:prstGeom>
-          <a:noFill/>
-        </p:spPr>
-        <p:txBody>
-          <a:bodyPr wrap="square" anchor="t" lIns="0" rIns="0" tIns="0" bIns="0">
-            <a:spAutoFit/>
-          </a:bodyPr>
-          <a:lstStyle/>
-          <a:p>
-            <a:pPr algn="l"/>
-            <a:r>
-              <a:rPr sz="1000" b="1" i="0">
-                <a:solidFill>
-                  <a:srgbClr val="8F989D"/>
-                </a:solidFill>
-                <a:latin typeface="Calibri"/>
-              </a:rPr>
-              <a:t>Inicio 5:10 pm</a:t>
-            </a:r>
-          </a:p>
-        </p:txBody>
-      </p:sp>
-      <p:sp>
-        <p:nvSpPr>
-          <p:cNvPr id="6" name="TextBox 5"/>
-          <p:cNvSpPr txBox="1"/>
-          <p:nvPr/>
-        </p:nvSpPr>
-        <p:spPr>
-          <a:xfrm>
             <a:off x="11094415" y="6446520"/>
             <a:ext cx="548640" cy="274320"/>
           </a:xfrm>
@@ -9254,41 +8834,6 @@
         </p:nvSpPr>
         <p:spPr>
           <a:xfrm>
-            <a:off x="2194560" y="6446520"/>
-            <a:ext cx="5943600" cy="274320"/>
-          </a:xfrm>
-          <a:prstGeom prst="rect">
-            <a:avLst/>
-          </a:prstGeom>
-          <a:noFill/>
-        </p:spPr>
-        <p:txBody>
-          <a:bodyPr wrap="square" anchor="t" lIns="0" rIns="0" tIns="0" bIns="0">
-            <a:spAutoFit/>
-          </a:bodyPr>
-          <a:lstStyle/>
-          <a:p>
-            <a:pPr algn="l"/>
-            <a:r>
-              <a:rPr sz="1000" b="1" i="0">
-                <a:solidFill>
-                  <a:srgbClr val="8F989D"/>
-                </a:solidFill>
-                <a:latin typeface="Calibri"/>
-              </a:rPr>
-              <a:t>Inicio 5:10 pm</a:t>
-            </a:r>
-          </a:p>
-        </p:txBody>
-      </p:sp>
-      <p:sp>
-        <p:nvSpPr>
-          <p:cNvPr id="6" name="TextBox 5"/>
-          <p:cNvSpPr txBox="1"/>
-          <p:nvPr/>
-        </p:nvSpPr>
-        <p:spPr>
-          <a:xfrm>
             <a:off x="11094415" y="6446520"/>
             <a:ext cx="548640" cy="274320"/>
           </a:xfrm>
@@ -9857,41 +9402,6 @@
         </p:nvSpPr>
         <p:spPr>
           <a:xfrm>
-            <a:off x="2194560" y="6446520"/>
-            <a:ext cx="5943600" cy="274320"/>
-          </a:xfrm>
-          <a:prstGeom prst="rect">
-            <a:avLst/>
-          </a:prstGeom>
-          <a:noFill/>
-        </p:spPr>
-        <p:txBody>
-          <a:bodyPr wrap="square" anchor="t" lIns="0" rIns="0" tIns="0" bIns="0">
-            <a:spAutoFit/>
-          </a:bodyPr>
-          <a:lstStyle/>
-          <a:p>
-            <a:pPr algn="l"/>
-            <a:r>
-              <a:rPr sz="1000" b="1" i="0">
-                <a:solidFill>
-                  <a:srgbClr val="8F989D"/>
-                </a:solidFill>
-                <a:latin typeface="Calibri"/>
-              </a:rPr>
-              <a:t>Inicio 5:10 pm</a:t>
-            </a:r>
-          </a:p>
-        </p:txBody>
-      </p:sp>
-      <p:sp>
-        <p:nvSpPr>
-          <p:cNvPr id="6" name="TextBox 5"/>
-          <p:cNvSpPr txBox="1"/>
-          <p:nvPr/>
-        </p:nvSpPr>
-        <p:spPr>
-          <a:xfrm>
             <a:off x="11094415" y="6446520"/>
             <a:ext cx="548640" cy="274320"/>
           </a:xfrm>
@@ -10125,41 +9635,6 @@
         </p:nvSpPr>
         <p:spPr>
           <a:xfrm>
-            <a:off x="2194560" y="6446520"/>
-            <a:ext cx="5943600" cy="274320"/>
-          </a:xfrm>
-          <a:prstGeom prst="rect">
-            <a:avLst/>
-          </a:prstGeom>
-          <a:noFill/>
-        </p:spPr>
-        <p:txBody>
-          <a:bodyPr wrap="square" anchor="t" lIns="0" rIns="0" tIns="0" bIns="0">
-            <a:spAutoFit/>
-          </a:bodyPr>
-          <a:lstStyle/>
-          <a:p>
-            <a:pPr algn="l"/>
-            <a:r>
-              <a:rPr sz="1000" b="1" i="0">
-                <a:solidFill>
-                  <a:srgbClr val="8F989D"/>
-                </a:solidFill>
-                <a:latin typeface="Calibri"/>
-              </a:rPr>
-              <a:t>Inicio 5:10 pm</a:t>
-            </a:r>
-          </a:p>
-        </p:txBody>
-      </p:sp>
-      <p:sp>
-        <p:nvSpPr>
-          <p:cNvPr id="6" name="TextBox 5"/>
-          <p:cNvSpPr txBox="1"/>
-          <p:nvPr/>
-        </p:nvSpPr>
-        <p:spPr>
-          <a:xfrm>
             <a:off x="11094415" y="6446520"/>
             <a:ext cx="548640" cy="274320"/>
           </a:xfrm>
@@ -10406,41 +9881,6 @@
           </a:p>
         </p:txBody>
       </p:sp>
-      <p:sp>
-        <p:nvSpPr>
-          <p:cNvPr id="7" name="TextBox 6"/>
-          <p:cNvSpPr txBox="1"/>
-          <p:nvPr/>
-        </p:nvSpPr>
-        <p:spPr>
-          <a:xfrm>
-            <a:off x="2194560" y="6446520"/>
-            <a:ext cx="5943600" cy="274320"/>
-          </a:xfrm>
-          <a:prstGeom prst="rect">
-            <a:avLst/>
-          </a:prstGeom>
-          <a:noFill/>
-        </p:spPr>
-        <p:txBody>
-          <a:bodyPr wrap="square" anchor="t" lIns="0" rIns="0" tIns="0" bIns="0">
-            <a:spAutoFit/>
-          </a:bodyPr>
-          <a:lstStyle/>
-          <a:p>
-            <a:pPr algn="l"/>
-            <a:r>
-              <a:rPr sz="1000" b="1" i="0">
-                <a:solidFill>
-                  <a:srgbClr val="8F989D"/>
-                </a:solidFill>
-                <a:latin typeface="Calibri"/>
-              </a:rPr>
-              <a:t>Inicio 5:10 pm</a:t>
-            </a:r>
-          </a:p>
-        </p:txBody>
-      </p:sp>
     </p:spTree>
   </p:cSld>
   <p:clrMapOvr>
@@ -10946,41 +10386,6 @@
         </p:nvSpPr>
         <p:spPr>
           <a:xfrm>
-            <a:off x="2194560" y="6446520"/>
-            <a:ext cx="5943600" cy="274320"/>
-          </a:xfrm>
-          <a:prstGeom prst="rect">
-            <a:avLst/>
-          </a:prstGeom>
-          <a:noFill/>
-        </p:spPr>
-        <p:txBody>
-          <a:bodyPr wrap="square" anchor="t" lIns="0" rIns="0" tIns="0" bIns="0">
-            <a:spAutoFit/>
-          </a:bodyPr>
-          <a:lstStyle/>
-          <a:p>
-            <a:pPr algn="l"/>
-            <a:r>
-              <a:rPr sz="1000" b="1" i="0">
-                <a:solidFill>
-                  <a:srgbClr val="8F989D"/>
-                </a:solidFill>
-                <a:latin typeface="Calibri"/>
-              </a:rPr>
-              <a:t>Inicio 5:10 pm</a:t>
-            </a:r>
-          </a:p>
-        </p:txBody>
-      </p:sp>
-      <p:sp>
-        <p:nvSpPr>
-          <p:cNvPr id="6" name="TextBox 5"/>
-          <p:cNvSpPr txBox="1"/>
-          <p:nvPr/>
-        </p:nvSpPr>
-        <p:spPr>
-          <a:xfrm>
             <a:off x="11094415" y="6446520"/>
             <a:ext cx="548640" cy="274320"/>
           </a:xfrm>
@@ -11481,41 +10886,6 @@
       <p:sp>
         <p:nvSpPr>
           <p:cNvPr id="5" name="TextBox 4"/>
-          <p:cNvSpPr txBox="1"/>
-          <p:nvPr/>
-        </p:nvSpPr>
-        <p:spPr>
-          <a:xfrm>
-            <a:off x="2194560" y="6446520"/>
-            <a:ext cx="5943600" cy="274320"/>
-          </a:xfrm>
-          <a:prstGeom prst="rect">
-            <a:avLst/>
-          </a:prstGeom>
-          <a:noFill/>
-        </p:spPr>
-        <p:txBody>
-          <a:bodyPr wrap="square" anchor="t" lIns="0" rIns="0" tIns="0" bIns="0">
-            <a:spAutoFit/>
-          </a:bodyPr>
-          <a:lstStyle/>
-          <a:p>
-            <a:pPr algn="l"/>
-            <a:r>
-              <a:rPr sz="1000" b="1" i="0">
-                <a:solidFill>
-                  <a:srgbClr val="8F989D"/>
-                </a:solidFill>
-                <a:latin typeface="Calibri"/>
-              </a:rPr>
-              <a:t>Inicio 5:10 pm</a:t>
-            </a:r>
-          </a:p>
-        </p:txBody>
-      </p:sp>
-      <p:sp>
-        <p:nvSpPr>
-          <p:cNvPr id="6" name="TextBox 5"/>
           <p:cNvSpPr txBox="1"/>
           <p:nvPr/>
         </p:nvSpPr>
@@ -12282,41 +11652,6 @@
         </p:nvSpPr>
         <p:spPr>
           <a:xfrm>
-            <a:off x="2194560" y="6446520"/>
-            <a:ext cx="5943600" cy="274320"/>
-          </a:xfrm>
-          <a:prstGeom prst="rect">
-            <a:avLst/>
-          </a:prstGeom>
-          <a:noFill/>
-        </p:spPr>
-        <p:txBody>
-          <a:bodyPr wrap="square" anchor="t" lIns="0" rIns="0" tIns="0" bIns="0">
-            <a:spAutoFit/>
-          </a:bodyPr>
-          <a:lstStyle/>
-          <a:p>
-            <a:pPr algn="l"/>
-            <a:r>
-              <a:rPr sz="1000" b="1" i="0">
-                <a:solidFill>
-                  <a:srgbClr val="8F989D"/>
-                </a:solidFill>
-                <a:latin typeface="Calibri"/>
-              </a:rPr>
-              <a:t>Inicio 5:10 pm</a:t>
-            </a:r>
-          </a:p>
-        </p:txBody>
-      </p:sp>
-      <p:sp>
-        <p:nvSpPr>
-          <p:cNvPr id="7" name="TextBox 6"/>
-          <p:cNvSpPr txBox="1"/>
-          <p:nvPr/>
-        </p:nvSpPr>
-        <p:spPr>
-          <a:xfrm>
             <a:off x="11094415" y="6446520"/>
             <a:ext cx="548640" cy="274320"/>
           </a:xfrm>
@@ -13053,41 +12388,6 @@
         </p:nvSpPr>
         <p:spPr>
           <a:xfrm>
-            <a:off x="2194560" y="6446520"/>
-            <a:ext cx="5943600" cy="274320"/>
-          </a:xfrm>
-          <a:prstGeom prst="rect">
-            <a:avLst/>
-          </a:prstGeom>
-          <a:noFill/>
-        </p:spPr>
-        <p:txBody>
-          <a:bodyPr wrap="square" anchor="t" lIns="0" rIns="0" tIns="0" bIns="0">
-            <a:spAutoFit/>
-          </a:bodyPr>
-          <a:lstStyle/>
-          <a:p>
-            <a:pPr algn="l"/>
-            <a:r>
-              <a:rPr sz="1000" b="1" i="0">
-                <a:solidFill>
-                  <a:srgbClr val="8F989D"/>
-                </a:solidFill>
-                <a:latin typeface="Calibri"/>
-              </a:rPr>
-              <a:t>Inicio 5:10 pm</a:t>
-            </a:r>
-          </a:p>
-        </p:txBody>
-      </p:sp>
-      <p:sp>
-        <p:nvSpPr>
-          <p:cNvPr id="7" name="TextBox 6"/>
-          <p:cNvSpPr txBox="1"/>
-          <p:nvPr/>
-        </p:nvSpPr>
-        <p:spPr>
-          <a:xfrm>
             <a:off x="11094415" y="6446520"/>
             <a:ext cx="548640" cy="274320"/>
           </a:xfrm>
@@ -13478,41 +12778,6 @@
         </p:nvSpPr>
         <p:spPr>
           <a:xfrm>
-            <a:off x="2194560" y="6446520"/>
-            <a:ext cx="5943600" cy="274320"/>
-          </a:xfrm>
-          <a:prstGeom prst="rect">
-            <a:avLst/>
-          </a:prstGeom>
-          <a:noFill/>
-        </p:spPr>
-        <p:txBody>
-          <a:bodyPr wrap="square" anchor="t" lIns="0" rIns="0" tIns="0" bIns="0">
-            <a:spAutoFit/>
-          </a:bodyPr>
-          <a:lstStyle/>
-          <a:p>
-            <a:pPr algn="l"/>
-            <a:r>
-              <a:rPr sz="1000" b="1" i="0">
-                <a:solidFill>
-                  <a:srgbClr val="8F989D"/>
-                </a:solidFill>
-                <a:latin typeface="Calibri"/>
-              </a:rPr>
-              <a:t>Inicio 5:10 pm</a:t>
-            </a:r>
-          </a:p>
-        </p:txBody>
-      </p:sp>
-      <p:sp>
-        <p:nvSpPr>
-          <p:cNvPr id="6" name="TextBox 5"/>
-          <p:cNvSpPr txBox="1"/>
-          <p:nvPr/>
-        </p:nvSpPr>
-        <p:spPr>
-          <a:xfrm>
             <a:off x="11094415" y="6446520"/>
             <a:ext cx="548640" cy="274320"/>
           </a:xfrm>
@@ -13778,41 +13043,6 @@
         </p:nvSpPr>
         <p:spPr>
           <a:xfrm>
-            <a:off x="2194560" y="6446520"/>
-            <a:ext cx="5943600" cy="274320"/>
-          </a:xfrm>
-          <a:prstGeom prst="rect">
-            <a:avLst/>
-          </a:prstGeom>
-          <a:noFill/>
-        </p:spPr>
-        <p:txBody>
-          <a:bodyPr wrap="square" anchor="t" lIns="0" rIns="0" tIns="0" bIns="0">
-            <a:spAutoFit/>
-          </a:bodyPr>
-          <a:lstStyle/>
-          <a:p>
-            <a:pPr algn="l"/>
-            <a:r>
-              <a:rPr sz="1000" b="1" i="0">
-                <a:solidFill>
-                  <a:srgbClr val="8F989D"/>
-                </a:solidFill>
-                <a:latin typeface="Calibri"/>
-              </a:rPr>
-              <a:t>Inicio 5:10 pm</a:t>
-            </a:r>
-          </a:p>
-        </p:txBody>
-      </p:sp>
-      <p:sp>
-        <p:nvSpPr>
-          <p:cNvPr id="6" name="TextBox 5"/>
-          <p:cNvSpPr txBox="1"/>
-          <p:nvPr/>
-        </p:nvSpPr>
-        <p:spPr>
-          <a:xfrm>
             <a:off x="11094415" y="6446520"/>
             <a:ext cx="548640" cy="274320"/>
           </a:xfrm>
@@ -14268,41 +13498,6 @@
       <p:sp>
         <p:nvSpPr>
           <p:cNvPr id="5" name="TextBox 4"/>
-          <p:cNvSpPr txBox="1"/>
-          <p:nvPr/>
-        </p:nvSpPr>
-        <p:spPr>
-          <a:xfrm>
-            <a:off x="2194560" y="6446520"/>
-            <a:ext cx="5943600" cy="274320"/>
-          </a:xfrm>
-          <a:prstGeom prst="rect">
-            <a:avLst/>
-          </a:prstGeom>
-          <a:noFill/>
-        </p:spPr>
-        <p:txBody>
-          <a:bodyPr wrap="square" anchor="t" lIns="0" rIns="0" tIns="0" bIns="0">
-            <a:spAutoFit/>
-          </a:bodyPr>
-          <a:lstStyle/>
-          <a:p>
-            <a:pPr algn="l"/>
-            <a:r>
-              <a:rPr sz="1000" b="1" i="0">
-                <a:solidFill>
-                  <a:srgbClr val="8F989D"/>
-                </a:solidFill>
-                <a:latin typeface="Calibri"/>
-              </a:rPr>
-              <a:t>Inicio 5:10 pm</a:t>
-            </a:r>
-          </a:p>
-        </p:txBody>
-      </p:sp>
-      <p:sp>
-        <p:nvSpPr>
-          <p:cNvPr id="6" name="TextBox 5"/>
           <p:cNvSpPr txBox="1"/>
           <p:nvPr/>
         </p:nvSpPr>

--- a/Pregrado/Creatividad y pensamiento innovador/Clases/Sesion 06 - Vigilancia tecnológica/Presentacion.pptx
+++ b/Pregrado/Creatividad y pensamiento innovador/Clases/Sesion 06 - Vigilancia tecnológica/Presentacion.pptx
@@ -8180,7 +8180,7 @@
                 </a:solidFill>
                 <a:latin typeface="Calibri"/>
               </a:rPr>
-              <a:t>`S07_Vigilancia_Apellido`</a:t>
+              <a:t>`S06_Vigilancia_Apellido`</a:t>
             </a:r>
             <a:r>
               <a:rPr sz="1600" b="0" i="0">
@@ -9154,7 +9154,7 @@
                 </a:solidFill>
                 <a:latin typeface="Calibri"/>
               </a:rPr>
-              <a:t>`S07_Vigilancia_Apellido`</a:t>
+              <a:t>`S06_Vigilancia_Apellido`</a:t>
             </a:r>
             <a:r>
               <a:rPr sz="1600" b="0" i="0">
